--- a/App/TaskLensTests/Fixtures/scale-100.pptx
+++ b/App/TaskLensTests/Fixtures/scale-100.pptx
@@ -3547,30 +3547,38 @@
           </a:p>
         </p:txBody>
       </p:sp>
-      <p:pic>
-        <p:nvPicPr>
-          <p:cNvPr id="3" name="Picture 2" descr="image.jpg"/>
-          <p:cNvPicPr>
-            <a:picLocks noChangeAspect="1"/>
-          </p:cNvPicPr>
-          <p:nvPr/>
-        </p:nvPicPr>
-        <p:blipFill>
-          <a:blip r:embed="rId2"/>
-          <a:stretch>
-            <a:fillRect/>
-          </a:stretch>
-        </p:blipFill>
+      <p:sp>
+        <p:nvSpPr>
+          <p:cNvPr id="3" name="TextBox 2"/>
+          <p:cNvSpPr txBox="1"/>
+          <p:nvPr/>
+        </p:nvSpPr>
         <p:spPr>
           <a:xfrm>
             <a:off x="457200" y="1371600"/>
-            <a:ext cx="7315200" cy="4114800"/>
-          </a:xfrm>
-          <a:prstGeom prst="rect">
-            <a:avLst/>
-          </a:prstGeom>
-        </p:spPr>
-      </p:pic>
+            <a:ext cx="11277295" cy="3657600"/>
+          </a:xfrm>
+          <a:prstGeom prst="rect">
+            <a:avLst/>
+          </a:prstGeom>
+          <a:noFill/>
+        </p:spPr>
+        <p:txBody>
+          <a:bodyPr wrap="square">
+            <a:spAutoFit/>
+          </a:bodyPr>
+          <a:lstStyle/>
+          <a:p>
+            <a:pPr algn="l"/>
+            <a:r>
+              <a:rPr sz="2000">
+                <a:latin typeface="Arial"/>
+              </a:rPr>
+              <a:t>English body text for the test. English body text for the test. English body text for the test. English body text for the test. English body text for the test. English body text for the test. English body text for the test. English body text for the test. </a:t>
+            </a:r>
+          </a:p>
+        </p:txBody>
+      </p:sp>
     </p:spTree>
   </p:cSld>
   <p:clrMapOvr>
@@ -3785,30 +3793,38 @@
           </a:p>
         </p:txBody>
       </p:sp>
-      <p:pic>
-        <p:nvPicPr>
-          <p:cNvPr id="3" name="Picture 2" descr="image.jpg"/>
-          <p:cNvPicPr>
-            <a:picLocks noChangeAspect="1"/>
-          </p:cNvPicPr>
-          <p:nvPr/>
-        </p:nvPicPr>
-        <p:blipFill>
-          <a:blip r:embed="rId2"/>
-          <a:stretch>
-            <a:fillRect/>
-          </a:stretch>
-        </p:blipFill>
+      <p:sp>
+        <p:nvSpPr>
+          <p:cNvPr id="3" name="TextBox 2"/>
+          <p:cNvSpPr txBox="1"/>
+          <p:nvPr/>
+        </p:nvSpPr>
         <p:spPr>
           <a:xfrm>
             <a:off x="457200" y="1371600"/>
-            <a:ext cx="7315200" cy="4114800"/>
-          </a:xfrm>
-          <a:prstGeom prst="rect">
-            <a:avLst/>
-          </a:prstGeom>
-        </p:spPr>
-      </p:pic>
+            <a:ext cx="11277295" cy="3657600"/>
+          </a:xfrm>
+          <a:prstGeom prst="rect">
+            <a:avLst/>
+          </a:prstGeom>
+          <a:noFill/>
+        </p:spPr>
+        <p:txBody>
+          <a:bodyPr wrap="square">
+            <a:spAutoFit/>
+          </a:bodyPr>
+          <a:lstStyle/>
+          <a:p>
+            <a:pPr algn="r" rtl="1"/>
+            <a:r>
+              <a:rPr sz="2000" lang="ar-SA">
+                <a:latin typeface="Arial"/>
+              </a:rPr>
+              <a:t>هذا نص عربي للاختبار. هذا نص عربي للاختبار. هذا نص عربي للاختبار. هذا نص عربي للاختبار. هذا نص عربي للاختبار. هذا نص عربي للاختبار. هذا نص عربي للاختبار. هذا نص عربي للاختبار. </a:t>
+            </a:r>
+          </a:p>
+        </p:txBody>
+      </p:sp>
     </p:spTree>
   </p:cSld>
   <p:clrMapOvr>
@@ -4023,30 +4039,38 @@
           </a:p>
         </p:txBody>
       </p:sp>
-      <p:pic>
-        <p:nvPicPr>
-          <p:cNvPr id="3" name="Picture 2" descr="image.jpg"/>
-          <p:cNvPicPr>
-            <a:picLocks noChangeAspect="1"/>
-          </p:cNvPicPr>
-          <p:nvPr/>
-        </p:nvPicPr>
-        <p:blipFill>
-          <a:blip r:embed="rId2"/>
-          <a:stretch>
-            <a:fillRect/>
-          </a:stretch>
-        </p:blipFill>
+      <p:sp>
+        <p:nvSpPr>
+          <p:cNvPr id="3" name="TextBox 2"/>
+          <p:cNvSpPr txBox="1"/>
+          <p:nvPr/>
+        </p:nvSpPr>
         <p:spPr>
           <a:xfrm>
             <a:off x="457200" y="1371600"/>
-            <a:ext cx="7315200" cy="4114800"/>
-          </a:xfrm>
-          <a:prstGeom prst="rect">
-            <a:avLst/>
-          </a:prstGeom>
-        </p:spPr>
-      </p:pic>
+            <a:ext cx="11277295" cy="3657600"/>
+          </a:xfrm>
+          <a:prstGeom prst="rect">
+            <a:avLst/>
+          </a:prstGeom>
+          <a:noFill/>
+        </p:spPr>
+        <p:txBody>
+          <a:bodyPr wrap="square">
+            <a:spAutoFit/>
+          </a:bodyPr>
+          <a:lstStyle/>
+          <a:p>
+            <a:pPr algn="l"/>
+            <a:r>
+              <a:rPr sz="2000">
+                <a:latin typeface="Arial"/>
+              </a:rPr>
+              <a:t>English body text for the test. English body text for the test. English body text for the test. English body text for the test. English body text for the test. English body text for the test. English body text for the test. English body text for the test. </a:t>
+            </a:r>
+          </a:p>
+        </p:txBody>
+      </p:sp>
     </p:spTree>
   </p:cSld>
   <p:clrMapOvr>
@@ -4343,30 +4367,38 @@
           </a:p>
         </p:txBody>
       </p:sp>
-      <p:pic>
-        <p:nvPicPr>
-          <p:cNvPr id="3" name="Picture 2" descr="image.jpg"/>
-          <p:cNvPicPr>
-            <a:picLocks noChangeAspect="1"/>
-          </p:cNvPicPr>
-          <p:nvPr/>
-        </p:nvPicPr>
-        <p:blipFill>
-          <a:blip r:embed="rId2"/>
-          <a:stretch>
-            <a:fillRect/>
-          </a:stretch>
-        </p:blipFill>
+      <p:sp>
+        <p:nvSpPr>
+          <p:cNvPr id="3" name="TextBox 2"/>
+          <p:cNvSpPr txBox="1"/>
+          <p:nvPr/>
+        </p:nvSpPr>
         <p:spPr>
           <a:xfrm>
             <a:off x="457200" y="1371600"/>
-            <a:ext cx="7315200" cy="4114800"/>
-          </a:xfrm>
-          <a:prstGeom prst="rect">
-            <a:avLst/>
-          </a:prstGeom>
-        </p:spPr>
-      </p:pic>
+            <a:ext cx="11277295" cy="3657600"/>
+          </a:xfrm>
+          <a:prstGeom prst="rect">
+            <a:avLst/>
+          </a:prstGeom>
+          <a:noFill/>
+        </p:spPr>
+        <p:txBody>
+          <a:bodyPr wrap="square">
+            <a:spAutoFit/>
+          </a:bodyPr>
+          <a:lstStyle/>
+          <a:p>
+            <a:pPr algn="r" rtl="1"/>
+            <a:r>
+              <a:rPr sz="2000" lang="ar-SA">
+                <a:latin typeface="Arial"/>
+              </a:rPr>
+              <a:t>هذا نص عربي للاختبار. هذا نص عربي للاختبار. هذا نص عربي للاختبار. هذا نص عربي للاختبار. هذا نص عربي للاختبار. هذا نص عربي للاختبار. هذا نص عربي للاختبار. هذا نص عربي للاختبار. </a:t>
+            </a:r>
+          </a:p>
+        </p:txBody>
+      </p:sp>
     </p:spTree>
   </p:cSld>
   <p:clrMapOvr>
@@ -4581,30 +4613,38 @@
           </a:p>
         </p:txBody>
       </p:sp>
-      <p:pic>
-        <p:nvPicPr>
-          <p:cNvPr id="3" name="Picture 2" descr="image.jpg"/>
-          <p:cNvPicPr>
-            <a:picLocks noChangeAspect="1"/>
-          </p:cNvPicPr>
-          <p:nvPr/>
-        </p:nvPicPr>
-        <p:blipFill>
-          <a:blip r:embed="rId2"/>
-          <a:stretch>
-            <a:fillRect/>
-          </a:stretch>
-        </p:blipFill>
+      <p:sp>
+        <p:nvSpPr>
+          <p:cNvPr id="3" name="TextBox 2"/>
+          <p:cNvSpPr txBox="1"/>
+          <p:nvPr/>
+        </p:nvSpPr>
         <p:spPr>
           <a:xfrm>
             <a:off x="457200" y="1371600"/>
-            <a:ext cx="7315200" cy="4114800"/>
-          </a:xfrm>
-          <a:prstGeom prst="rect">
-            <a:avLst/>
-          </a:prstGeom>
-        </p:spPr>
-      </p:pic>
+            <a:ext cx="11277295" cy="3657600"/>
+          </a:xfrm>
+          <a:prstGeom prst="rect">
+            <a:avLst/>
+          </a:prstGeom>
+          <a:noFill/>
+        </p:spPr>
+        <p:txBody>
+          <a:bodyPr wrap="square">
+            <a:spAutoFit/>
+          </a:bodyPr>
+          <a:lstStyle/>
+          <a:p>
+            <a:pPr algn="l"/>
+            <a:r>
+              <a:rPr sz="2000">
+                <a:latin typeface="Arial"/>
+              </a:rPr>
+              <a:t>English body text for the test. English body text for the test. English body text for the test. English body text for the test. English body text for the test. English body text for the test. English body text for the test. English body text for the test. </a:t>
+            </a:r>
+          </a:p>
+        </p:txBody>
+      </p:sp>
     </p:spTree>
   </p:cSld>
   <p:clrMapOvr>
@@ -4819,30 +4859,38 @@
           </a:p>
         </p:txBody>
       </p:sp>
-      <p:pic>
-        <p:nvPicPr>
-          <p:cNvPr id="3" name="Picture 2" descr="image.jpg"/>
-          <p:cNvPicPr>
-            <a:picLocks noChangeAspect="1"/>
-          </p:cNvPicPr>
-          <p:nvPr/>
-        </p:nvPicPr>
-        <p:blipFill>
-          <a:blip r:embed="rId2"/>
-          <a:stretch>
-            <a:fillRect/>
-          </a:stretch>
-        </p:blipFill>
+      <p:sp>
+        <p:nvSpPr>
+          <p:cNvPr id="3" name="TextBox 2"/>
+          <p:cNvSpPr txBox="1"/>
+          <p:nvPr/>
+        </p:nvSpPr>
         <p:spPr>
           <a:xfrm>
             <a:off x="457200" y="1371600"/>
-            <a:ext cx="7315200" cy="4114800"/>
-          </a:xfrm>
-          <a:prstGeom prst="rect">
-            <a:avLst/>
-          </a:prstGeom>
-        </p:spPr>
-      </p:pic>
+            <a:ext cx="11277295" cy="3657600"/>
+          </a:xfrm>
+          <a:prstGeom prst="rect">
+            <a:avLst/>
+          </a:prstGeom>
+          <a:noFill/>
+        </p:spPr>
+        <p:txBody>
+          <a:bodyPr wrap="square">
+            <a:spAutoFit/>
+          </a:bodyPr>
+          <a:lstStyle/>
+          <a:p>
+            <a:pPr algn="r" rtl="1"/>
+            <a:r>
+              <a:rPr sz="2000" lang="ar-SA">
+                <a:latin typeface="Arial"/>
+              </a:rPr>
+              <a:t>هذا نص عربي للاختبار. هذا نص عربي للاختبار. هذا نص عربي للاختبار. هذا نص عربي للاختبار. هذا نص عربي للاختبار. هذا نص عربي للاختبار. هذا نص عربي للاختبار. هذا نص عربي للاختبار. </a:t>
+            </a:r>
+          </a:p>
+        </p:txBody>
+      </p:sp>
     </p:spTree>
   </p:cSld>
   <p:clrMapOvr>
@@ -5131,30 +5179,38 @@
           </a:p>
         </p:txBody>
       </p:sp>
-      <p:pic>
-        <p:nvPicPr>
-          <p:cNvPr id="3" name="Picture 2" descr="image.jpg"/>
-          <p:cNvPicPr>
-            <a:picLocks noChangeAspect="1"/>
-          </p:cNvPicPr>
-          <p:nvPr/>
-        </p:nvPicPr>
-        <p:blipFill>
-          <a:blip r:embed="rId2"/>
-          <a:stretch>
-            <a:fillRect/>
-          </a:stretch>
-        </p:blipFill>
+      <p:sp>
+        <p:nvSpPr>
+          <p:cNvPr id="3" name="TextBox 2"/>
+          <p:cNvSpPr txBox="1"/>
+          <p:nvPr/>
+        </p:nvSpPr>
         <p:spPr>
           <a:xfrm>
             <a:off x="457200" y="1371600"/>
-            <a:ext cx="7315200" cy="4114800"/>
-          </a:xfrm>
-          <a:prstGeom prst="rect">
-            <a:avLst/>
-          </a:prstGeom>
-        </p:spPr>
-      </p:pic>
+            <a:ext cx="11277295" cy="3657600"/>
+          </a:xfrm>
+          <a:prstGeom prst="rect">
+            <a:avLst/>
+          </a:prstGeom>
+          <a:noFill/>
+        </p:spPr>
+        <p:txBody>
+          <a:bodyPr wrap="square">
+            <a:spAutoFit/>
+          </a:bodyPr>
+          <a:lstStyle/>
+          <a:p>
+            <a:pPr algn="l"/>
+            <a:r>
+              <a:rPr sz="2000">
+                <a:latin typeface="Arial"/>
+              </a:rPr>
+              <a:t>English body text for the test. English body text for the test. English body text for the test. English body text for the test. English body text for the test. English body text for the test. English body text for the test. English body text for the test. </a:t>
+            </a:r>
+          </a:p>
+        </p:txBody>
+      </p:sp>
     </p:spTree>
   </p:cSld>
   <p:clrMapOvr>
@@ -5369,30 +5425,38 @@
           </a:p>
         </p:txBody>
       </p:sp>
-      <p:pic>
-        <p:nvPicPr>
-          <p:cNvPr id="3" name="Picture 2" descr="image.jpg"/>
-          <p:cNvPicPr>
-            <a:picLocks noChangeAspect="1"/>
-          </p:cNvPicPr>
-          <p:nvPr/>
-        </p:nvPicPr>
-        <p:blipFill>
-          <a:blip r:embed="rId2"/>
-          <a:stretch>
-            <a:fillRect/>
-          </a:stretch>
-        </p:blipFill>
+      <p:sp>
+        <p:nvSpPr>
+          <p:cNvPr id="3" name="TextBox 2"/>
+          <p:cNvSpPr txBox="1"/>
+          <p:nvPr/>
+        </p:nvSpPr>
         <p:spPr>
           <a:xfrm>
             <a:off x="457200" y="1371600"/>
-            <a:ext cx="7315200" cy="4114800"/>
-          </a:xfrm>
-          <a:prstGeom prst="rect">
-            <a:avLst/>
-          </a:prstGeom>
-        </p:spPr>
-      </p:pic>
+            <a:ext cx="11277295" cy="3657600"/>
+          </a:xfrm>
+          <a:prstGeom prst="rect">
+            <a:avLst/>
+          </a:prstGeom>
+          <a:noFill/>
+        </p:spPr>
+        <p:txBody>
+          <a:bodyPr wrap="square">
+            <a:spAutoFit/>
+          </a:bodyPr>
+          <a:lstStyle/>
+          <a:p>
+            <a:pPr algn="r" rtl="1"/>
+            <a:r>
+              <a:rPr sz="2000" lang="ar-SA">
+                <a:latin typeface="Arial"/>
+              </a:rPr>
+              <a:t>هذا نص عربي للاختبار. هذا نص عربي للاختبار. هذا نص عربي للاختبار. هذا نص عربي للاختبار. هذا نص عربي للاختبار. هذا نص عربي للاختبار. هذا نص عربي للاختبار. هذا نص عربي للاختبار. </a:t>
+            </a:r>
+          </a:p>
+        </p:txBody>
+      </p:sp>
     </p:spTree>
   </p:cSld>
   <p:clrMapOvr>
@@ -5607,30 +5671,38 @@
           </a:p>
         </p:txBody>
       </p:sp>
-      <p:pic>
-        <p:nvPicPr>
-          <p:cNvPr id="3" name="Picture 2" descr="image.jpg"/>
-          <p:cNvPicPr>
-            <a:picLocks noChangeAspect="1"/>
-          </p:cNvPicPr>
-          <p:nvPr/>
-        </p:nvPicPr>
-        <p:blipFill>
-          <a:blip r:embed="rId2"/>
-          <a:stretch>
-            <a:fillRect/>
-          </a:stretch>
-        </p:blipFill>
+      <p:sp>
+        <p:nvSpPr>
+          <p:cNvPr id="3" name="TextBox 2"/>
+          <p:cNvSpPr txBox="1"/>
+          <p:nvPr/>
+        </p:nvSpPr>
         <p:spPr>
           <a:xfrm>
             <a:off x="457200" y="1371600"/>
-            <a:ext cx="7315200" cy="4114800"/>
-          </a:xfrm>
-          <a:prstGeom prst="rect">
-            <a:avLst/>
-          </a:prstGeom>
-        </p:spPr>
-      </p:pic>
+            <a:ext cx="11277295" cy="3657600"/>
+          </a:xfrm>
+          <a:prstGeom prst="rect">
+            <a:avLst/>
+          </a:prstGeom>
+          <a:noFill/>
+        </p:spPr>
+        <p:txBody>
+          <a:bodyPr wrap="square">
+            <a:spAutoFit/>
+          </a:bodyPr>
+          <a:lstStyle/>
+          <a:p>
+            <a:pPr algn="l"/>
+            <a:r>
+              <a:rPr sz="2000">
+                <a:latin typeface="Arial"/>
+              </a:rPr>
+              <a:t>English body text for the test. English body text for the test. English body text for the test. English body text for the test. English body text for the test. English body text for the test. English body text for the test. English body text for the test. </a:t>
+            </a:r>
+          </a:p>
+        </p:txBody>
+      </p:sp>
     </p:spTree>
   </p:cSld>
   <p:clrMapOvr>
@@ -5845,30 +5917,38 @@
           </a:p>
         </p:txBody>
       </p:sp>
-      <p:pic>
-        <p:nvPicPr>
-          <p:cNvPr id="3" name="Picture 2" descr="image.jpg"/>
-          <p:cNvPicPr>
-            <a:picLocks noChangeAspect="1"/>
-          </p:cNvPicPr>
-          <p:nvPr/>
-        </p:nvPicPr>
-        <p:blipFill>
-          <a:blip r:embed="rId2"/>
-          <a:stretch>
-            <a:fillRect/>
-          </a:stretch>
-        </p:blipFill>
+      <p:sp>
+        <p:nvSpPr>
+          <p:cNvPr id="3" name="TextBox 2"/>
+          <p:cNvSpPr txBox="1"/>
+          <p:nvPr/>
+        </p:nvSpPr>
         <p:spPr>
           <a:xfrm>
             <a:off x="457200" y="1371600"/>
-            <a:ext cx="7315200" cy="4114800"/>
-          </a:xfrm>
-          <a:prstGeom prst="rect">
-            <a:avLst/>
-          </a:prstGeom>
-        </p:spPr>
-      </p:pic>
+            <a:ext cx="11277295" cy="3657600"/>
+          </a:xfrm>
+          <a:prstGeom prst="rect">
+            <a:avLst/>
+          </a:prstGeom>
+          <a:noFill/>
+        </p:spPr>
+        <p:txBody>
+          <a:bodyPr wrap="square">
+            <a:spAutoFit/>
+          </a:bodyPr>
+          <a:lstStyle/>
+          <a:p>
+            <a:pPr algn="r" rtl="1"/>
+            <a:r>
+              <a:rPr sz="2000" lang="ar-SA">
+                <a:latin typeface="Arial"/>
+              </a:rPr>
+              <a:t>هذا نص عربي للاختبار. هذا نص عربي للاختبار. هذا نص عربي للاختبار. هذا نص عربي للاختبار. هذا نص عربي للاختبار. هذا نص عربي للاختبار. هذا نص عربي للاختبار. هذا نص عربي للاختبار. </a:t>
+            </a:r>
+          </a:p>
+        </p:txBody>
+      </p:sp>
     </p:spTree>
   </p:cSld>
   <p:clrMapOvr>
@@ -6165,30 +6245,38 @@
           </a:p>
         </p:txBody>
       </p:sp>
-      <p:pic>
-        <p:nvPicPr>
-          <p:cNvPr id="3" name="Picture 2" descr="image.jpg"/>
-          <p:cNvPicPr>
-            <a:picLocks noChangeAspect="1"/>
-          </p:cNvPicPr>
-          <p:nvPr/>
-        </p:nvPicPr>
-        <p:blipFill>
-          <a:blip r:embed="rId2"/>
-          <a:stretch>
-            <a:fillRect/>
-          </a:stretch>
-        </p:blipFill>
+      <p:sp>
+        <p:nvSpPr>
+          <p:cNvPr id="3" name="TextBox 2"/>
+          <p:cNvSpPr txBox="1"/>
+          <p:nvPr/>
+        </p:nvSpPr>
         <p:spPr>
           <a:xfrm>
             <a:off x="457200" y="1371600"/>
-            <a:ext cx="7315200" cy="4114800"/>
-          </a:xfrm>
-          <a:prstGeom prst="rect">
-            <a:avLst/>
-          </a:prstGeom>
-        </p:spPr>
-      </p:pic>
+            <a:ext cx="11277295" cy="3657600"/>
+          </a:xfrm>
+          <a:prstGeom prst="rect">
+            <a:avLst/>
+          </a:prstGeom>
+          <a:noFill/>
+        </p:spPr>
+        <p:txBody>
+          <a:bodyPr wrap="square">
+            <a:spAutoFit/>
+          </a:bodyPr>
+          <a:lstStyle/>
+          <a:p>
+            <a:pPr algn="l"/>
+            <a:r>
+              <a:rPr sz="2000">
+                <a:latin typeface="Arial"/>
+              </a:rPr>
+              <a:t>English body text for the test. English body text for the test. English body text for the test. English body text for the test. English body text for the test. English body text for the test. English body text for the test. English body text for the test. </a:t>
+            </a:r>
+          </a:p>
+        </p:txBody>
+      </p:sp>
     </p:spTree>
   </p:cSld>
   <p:clrMapOvr>
@@ -6403,30 +6491,38 @@
           </a:p>
         </p:txBody>
       </p:sp>
-      <p:pic>
-        <p:nvPicPr>
-          <p:cNvPr id="3" name="Picture 2" descr="image.jpg"/>
-          <p:cNvPicPr>
-            <a:picLocks noChangeAspect="1"/>
-          </p:cNvPicPr>
-          <p:nvPr/>
-        </p:nvPicPr>
-        <p:blipFill>
-          <a:blip r:embed="rId2"/>
-          <a:stretch>
-            <a:fillRect/>
-          </a:stretch>
-        </p:blipFill>
+      <p:sp>
+        <p:nvSpPr>
+          <p:cNvPr id="3" name="TextBox 2"/>
+          <p:cNvSpPr txBox="1"/>
+          <p:nvPr/>
+        </p:nvSpPr>
         <p:spPr>
           <a:xfrm>
             <a:off x="457200" y="1371600"/>
-            <a:ext cx="7315200" cy="4114800"/>
-          </a:xfrm>
-          <a:prstGeom prst="rect">
-            <a:avLst/>
-          </a:prstGeom>
-        </p:spPr>
-      </p:pic>
+            <a:ext cx="11277295" cy="3657600"/>
+          </a:xfrm>
+          <a:prstGeom prst="rect">
+            <a:avLst/>
+          </a:prstGeom>
+          <a:noFill/>
+        </p:spPr>
+        <p:txBody>
+          <a:bodyPr wrap="square">
+            <a:spAutoFit/>
+          </a:bodyPr>
+          <a:lstStyle/>
+          <a:p>
+            <a:pPr algn="r" rtl="1"/>
+            <a:r>
+              <a:rPr sz="2000" lang="ar-SA">
+                <a:latin typeface="Arial"/>
+              </a:rPr>
+              <a:t>هذا نص عربي للاختبار. هذا نص عربي للاختبار. هذا نص عربي للاختبار. هذا نص عربي للاختبار. هذا نص عربي للاختبار. هذا نص عربي للاختبار. هذا نص عربي للاختبار. هذا نص عربي للاختبار. </a:t>
+            </a:r>
+          </a:p>
+        </p:txBody>
+      </p:sp>
     </p:spTree>
   </p:cSld>
   <p:clrMapOvr>
@@ -6641,30 +6737,38 @@
           </a:p>
         </p:txBody>
       </p:sp>
-      <p:pic>
-        <p:nvPicPr>
-          <p:cNvPr id="3" name="Picture 2" descr="image.jpg"/>
-          <p:cNvPicPr>
-            <a:picLocks noChangeAspect="1"/>
-          </p:cNvPicPr>
-          <p:nvPr/>
-        </p:nvPicPr>
-        <p:blipFill>
-          <a:blip r:embed="rId2"/>
-          <a:stretch>
-            <a:fillRect/>
-          </a:stretch>
-        </p:blipFill>
+      <p:sp>
+        <p:nvSpPr>
+          <p:cNvPr id="3" name="TextBox 2"/>
+          <p:cNvSpPr txBox="1"/>
+          <p:nvPr/>
+        </p:nvSpPr>
         <p:spPr>
           <a:xfrm>
             <a:off x="457200" y="1371600"/>
-            <a:ext cx="7315200" cy="4114800"/>
-          </a:xfrm>
-          <a:prstGeom prst="rect">
-            <a:avLst/>
-          </a:prstGeom>
-        </p:spPr>
-      </p:pic>
+            <a:ext cx="11277295" cy="3657600"/>
+          </a:xfrm>
+          <a:prstGeom prst="rect">
+            <a:avLst/>
+          </a:prstGeom>
+          <a:noFill/>
+        </p:spPr>
+        <p:txBody>
+          <a:bodyPr wrap="square">
+            <a:spAutoFit/>
+          </a:bodyPr>
+          <a:lstStyle/>
+          <a:p>
+            <a:pPr algn="l"/>
+            <a:r>
+              <a:rPr sz="2000">
+                <a:latin typeface="Arial"/>
+              </a:rPr>
+              <a:t>English body text for the test. English body text for the test. English body text for the test. English body text for the test. English body text for the test. English body text for the test. English body text for the test. English body text for the test. </a:t>
+            </a:r>
+          </a:p>
+        </p:txBody>
+      </p:sp>
     </p:spTree>
   </p:cSld>
   <p:clrMapOvr>
@@ -6961,30 +7065,38 @@
           </a:p>
         </p:txBody>
       </p:sp>
-      <p:pic>
-        <p:nvPicPr>
-          <p:cNvPr id="3" name="Picture 2" descr="image.jpg"/>
-          <p:cNvPicPr>
-            <a:picLocks noChangeAspect="1"/>
-          </p:cNvPicPr>
-          <p:nvPr/>
-        </p:nvPicPr>
-        <p:blipFill>
-          <a:blip r:embed="rId2"/>
-          <a:stretch>
-            <a:fillRect/>
-          </a:stretch>
-        </p:blipFill>
+      <p:sp>
+        <p:nvSpPr>
+          <p:cNvPr id="3" name="TextBox 2"/>
+          <p:cNvSpPr txBox="1"/>
+          <p:nvPr/>
+        </p:nvSpPr>
         <p:spPr>
           <a:xfrm>
             <a:off x="457200" y="1371600"/>
-            <a:ext cx="7315200" cy="4114800"/>
-          </a:xfrm>
-          <a:prstGeom prst="rect">
-            <a:avLst/>
-          </a:prstGeom>
-        </p:spPr>
-      </p:pic>
+            <a:ext cx="11277295" cy="3657600"/>
+          </a:xfrm>
+          <a:prstGeom prst="rect">
+            <a:avLst/>
+          </a:prstGeom>
+          <a:noFill/>
+        </p:spPr>
+        <p:txBody>
+          <a:bodyPr wrap="square">
+            <a:spAutoFit/>
+          </a:bodyPr>
+          <a:lstStyle/>
+          <a:p>
+            <a:pPr algn="r" rtl="1"/>
+            <a:r>
+              <a:rPr sz="2000" lang="ar-SA">
+                <a:latin typeface="Arial"/>
+              </a:rPr>
+              <a:t>هذا نص عربي للاختبار. هذا نص عربي للاختبار. هذا نص عربي للاختبار. هذا نص عربي للاختبار. هذا نص عربي للاختبار. هذا نص عربي للاختبار. هذا نص عربي للاختبار. هذا نص عربي للاختبار. </a:t>
+            </a:r>
+          </a:p>
+        </p:txBody>
+      </p:sp>
     </p:spTree>
   </p:cSld>
   <p:clrMapOvr>
@@ -7199,30 +7311,38 @@
           </a:p>
         </p:txBody>
       </p:sp>
-      <p:pic>
-        <p:nvPicPr>
-          <p:cNvPr id="3" name="Picture 2" descr="image.jpg"/>
-          <p:cNvPicPr>
-            <a:picLocks noChangeAspect="1"/>
-          </p:cNvPicPr>
-          <p:nvPr/>
-        </p:nvPicPr>
-        <p:blipFill>
-          <a:blip r:embed="rId2"/>
-          <a:stretch>
-            <a:fillRect/>
-          </a:stretch>
-        </p:blipFill>
+      <p:sp>
+        <p:nvSpPr>
+          <p:cNvPr id="3" name="TextBox 2"/>
+          <p:cNvSpPr txBox="1"/>
+          <p:nvPr/>
+        </p:nvSpPr>
         <p:spPr>
           <a:xfrm>
             <a:off x="457200" y="1371600"/>
-            <a:ext cx="7315200" cy="4114800"/>
-          </a:xfrm>
-          <a:prstGeom prst="rect">
-            <a:avLst/>
-          </a:prstGeom>
-        </p:spPr>
-      </p:pic>
+            <a:ext cx="11277295" cy="3657600"/>
+          </a:xfrm>
+          <a:prstGeom prst="rect">
+            <a:avLst/>
+          </a:prstGeom>
+          <a:noFill/>
+        </p:spPr>
+        <p:txBody>
+          <a:bodyPr wrap="square">
+            <a:spAutoFit/>
+          </a:bodyPr>
+          <a:lstStyle/>
+          <a:p>
+            <a:pPr algn="l"/>
+            <a:r>
+              <a:rPr sz="2000">
+                <a:latin typeface="Arial"/>
+              </a:rPr>
+              <a:t>English body text for the test. English body text for the test. English body text for the test. English body text for the test. English body text for the test. English body text for the test. English body text for the test. English body text for the test. </a:t>
+            </a:r>
+          </a:p>
+        </p:txBody>
+      </p:sp>
     </p:spTree>
   </p:cSld>
   <p:clrMapOvr>
@@ -7437,30 +7557,38 @@
           </a:p>
         </p:txBody>
       </p:sp>
-      <p:pic>
-        <p:nvPicPr>
-          <p:cNvPr id="3" name="Picture 2" descr="image.jpg"/>
-          <p:cNvPicPr>
-            <a:picLocks noChangeAspect="1"/>
-          </p:cNvPicPr>
-          <p:nvPr/>
-        </p:nvPicPr>
-        <p:blipFill>
-          <a:blip r:embed="rId2"/>
-          <a:stretch>
-            <a:fillRect/>
-          </a:stretch>
-        </p:blipFill>
+      <p:sp>
+        <p:nvSpPr>
+          <p:cNvPr id="3" name="TextBox 2"/>
+          <p:cNvSpPr txBox="1"/>
+          <p:nvPr/>
+        </p:nvSpPr>
         <p:spPr>
           <a:xfrm>
             <a:off x="457200" y="1371600"/>
-            <a:ext cx="7315200" cy="4114800"/>
-          </a:xfrm>
-          <a:prstGeom prst="rect">
-            <a:avLst/>
-          </a:prstGeom>
-        </p:spPr>
-      </p:pic>
+            <a:ext cx="11277295" cy="3657600"/>
+          </a:xfrm>
+          <a:prstGeom prst="rect">
+            <a:avLst/>
+          </a:prstGeom>
+          <a:noFill/>
+        </p:spPr>
+        <p:txBody>
+          <a:bodyPr wrap="square">
+            <a:spAutoFit/>
+          </a:bodyPr>
+          <a:lstStyle/>
+          <a:p>
+            <a:pPr algn="r" rtl="1"/>
+            <a:r>
+              <a:rPr sz="2000" lang="ar-SA">
+                <a:latin typeface="Arial"/>
+              </a:rPr>
+              <a:t>هذا نص عربي للاختبار. هذا نص عربي للاختبار. هذا نص عربي للاختبار. هذا نص عربي للاختبار. هذا نص عربي للاختبار. هذا نص عربي للاختبار. هذا نص عربي للاختبار. هذا نص عربي للاختبار. </a:t>
+            </a:r>
+          </a:p>
+        </p:txBody>
+      </p:sp>
     </p:spTree>
   </p:cSld>
   <p:clrMapOvr>
@@ -7675,30 +7803,38 @@
           </a:p>
         </p:txBody>
       </p:sp>
-      <p:pic>
-        <p:nvPicPr>
-          <p:cNvPr id="3" name="Picture 2" descr="image.jpg"/>
-          <p:cNvPicPr>
-            <a:picLocks noChangeAspect="1"/>
-          </p:cNvPicPr>
-          <p:nvPr/>
-        </p:nvPicPr>
-        <p:blipFill>
-          <a:blip r:embed="rId2"/>
-          <a:stretch>
-            <a:fillRect/>
-          </a:stretch>
-        </p:blipFill>
+      <p:sp>
+        <p:nvSpPr>
+          <p:cNvPr id="3" name="TextBox 2"/>
+          <p:cNvSpPr txBox="1"/>
+          <p:nvPr/>
+        </p:nvSpPr>
         <p:spPr>
           <a:xfrm>
             <a:off x="457200" y="1371600"/>
-            <a:ext cx="7315200" cy="4114800"/>
-          </a:xfrm>
-          <a:prstGeom prst="rect">
-            <a:avLst/>
-          </a:prstGeom>
-        </p:spPr>
-      </p:pic>
+            <a:ext cx="11277295" cy="3657600"/>
+          </a:xfrm>
+          <a:prstGeom prst="rect">
+            <a:avLst/>
+          </a:prstGeom>
+          <a:noFill/>
+        </p:spPr>
+        <p:txBody>
+          <a:bodyPr wrap="square">
+            <a:spAutoFit/>
+          </a:bodyPr>
+          <a:lstStyle/>
+          <a:p>
+            <a:pPr algn="l"/>
+            <a:r>
+              <a:rPr sz="2000">
+                <a:latin typeface="Arial"/>
+              </a:rPr>
+              <a:t>English body text for the test. English body text for the test. English body text for the test. English body text for the test. English body text for the test. English body text for the test. English body text for the test. English body text for the test. </a:t>
+            </a:r>
+          </a:p>
+        </p:txBody>
+      </p:sp>
     </p:spTree>
   </p:cSld>
   <p:clrMapOvr>
@@ -7749,30 +7885,38 @@
           </a:p>
         </p:txBody>
       </p:sp>
-      <p:pic>
-        <p:nvPicPr>
-          <p:cNvPr id="3" name="Picture 2" descr="image.jpg"/>
-          <p:cNvPicPr>
-            <a:picLocks noChangeAspect="1"/>
-          </p:cNvPicPr>
-          <p:nvPr/>
-        </p:nvPicPr>
-        <p:blipFill>
-          <a:blip r:embed="rId2"/>
-          <a:stretch>
-            <a:fillRect/>
-          </a:stretch>
-        </p:blipFill>
+      <p:sp>
+        <p:nvSpPr>
+          <p:cNvPr id="3" name="TextBox 2"/>
+          <p:cNvSpPr txBox="1"/>
+          <p:nvPr/>
+        </p:nvSpPr>
         <p:spPr>
           <a:xfrm>
             <a:off x="457200" y="1371600"/>
-            <a:ext cx="7315200" cy="4114800"/>
-          </a:xfrm>
-          <a:prstGeom prst="rect">
-            <a:avLst/>
-          </a:prstGeom>
-        </p:spPr>
-      </p:pic>
+            <a:ext cx="11277295" cy="3657600"/>
+          </a:xfrm>
+          <a:prstGeom prst="rect">
+            <a:avLst/>
+          </a:prstGeom>
+          <a:noFill/>
+        </p:spPr>
+        <p:txBody>
+          <a:bodyPr wrap="square">
+            <a:spAutoFit/>
+          </a:bodyPr>
+          <a:lstStyle/>
+          <a:p>
+            <a:pPr algn="l"/>
+            <a:r>
+              <a:rPr sz="2000">
+                <a:latin typeface="Arial"/>
+              </a:rPr>
+              <a:t>English body text for the test. English body text for the test. English body text for the test. English body text for the test. English body text for the test. English body text for the test. English body text for the test. English body text for the test. </a:t>
+            </a:r>
+          </a:p>
+        </p:txBody>
+      </p:sp>
     </p:spTree>
   </p:cSld>
   <p:clrMapOvr>
@@ -7987,30 +8131,38 @@
           </a:p>
         </p:txBody>
       </p:sp>
-      <p:pic>
-        <p:nvPicPr>
-          <p:cNvPr id="3" name="Picture 2" descr="image.jpg"/>
-          <p:cNvPicPr>
-            <a:picLocks noChangeAspect="1"/>
-          </p:cNvPicPr>
-          <p:nvPr/>
-        </p:nvPicPr>
-        <p:blipFill>
-          <a:blip r:embed="rId2"/>
-          <a:stretch>
-            <a:fillRect/>
-          </a:stretch>
-        </p:blipFill>
+      <p:sp>
+        <p:nvSpPr>
+          <p:cNvPr id="3" name="TextBox 2"/>
+          <p:cNvSpPr txBox="1"/>
+          <p:nvPr/>
+        </p:nvSpPr>
         <p:spPr>
           <a:xfrm>
             <a:off x="457200" y="1371600"/>
-            <a:ext cx="7315200" cy="4114800"/>
-          </a:xfrm>
-          <a:prstGeom prst="rect">
-            <a:avLst/>
-          </a:prstGeom>
-        </p:spPr>
-      </p:pic>
+            <a:ext cx="11277295" cy="3657600"/>
+          </a:xfrm>
+          <a:prstGeom prst="rect">
+            <a:avLst/>
+          </a:prstGeom>
+          <a:noFill/>
+        </p:spPr>
+        <p:txBody>
+          <a:bodyPr wrap="square">
+            <a:spAutoFit/>
+          </a:bodyPr>
+          <a:lstStyle/>
+          <a:p>
+            <a:pPr algn="r" rtl="1"/>
+            <a:r>
+              <a:rPr sz="2000" lang="ar-SA">
+                <a:latin typeface="Arial"/>
+              </a:rPr>
+              <a:t>هذا نص عربي للاختبار. هذا نص عربي للاختبار. هذا نص عربي للاختبار. هذا نص عربي للاختبار. هذا نص عربي للاختبار. هذا نص عربي للاختبار. هذا نص عربي للاختبار. هذا نص عربي للاختبار. </a:t>
+            </a:r>
+          </a:p>
+        </p:txBody>
+      </p:sp>
     </p:spTree>
   </p:cSld>
   <p:clrMapOvr>
@@ -8225,30 +8377,38 @@
           </a:p>
         </p:txBody>
       </p:sp>
-      <p:pic>
-        <p:nvPicPr>
-          <p:cNvPr id="3" name="Picture 2" descr="image.jpg"/>
-          <p:cNvPicPr>
-            <a:picLocks noChangeAspect="1"/>
-          </p:cNvPicPr>
-          <p:nvPr/>
-        </p:nvPicPr>
-        <p:blipFill>
-          <a:blip r:embed="rId2"/>
-          <a:stretch>
-            <a:fillRect/>
-          </a:stretch>
-        </p:blipFill>
+      <p:sp>
+        <p:nvSpPr>
+          <p:cNvPr id="3" name="TextBox 2"/>
+          <p:cNvSpPr txBox="1"/>
+          <p:nvPr/>
+        </p:nvSpPr>
         <p:spPr>
           <a:xfrm>
             <a:off x="457200" y="1371600"/>
-            <a:ext cx="7315200" cy="4114800"/>
-          </a:xfrm>
-          <a:prstGeom prst="rect">
-            <a:avLst/>
-          </a:prstGeom>
-        </p:spPr>
-      </p:pic>
+            <a:ext cx="11277295" cy="3657600"/>
+          </a:xfrm>
+          <a:prstGeom prst="rect">
+            <a:avLst/>
+          </a:prstGeom>
+          <a:noFill/>
+        </p:spPr>
+        <p:txBody>
+          <a:bodyPr wrap="square">
+            <a:spAutoFit/>
+          </a:bodyPr>
+          <a:lstStyle/>
+          <a:p>
+            <a:pPr algn="l"/>
+            <a:r>
+              <a:rPr sz="2000">
+                <a:latin typeface="Arial"/>
+              </a:rPr>
+              <a:t>English body text for the test. English body text for the test. English body text for the test. English body text for the test. English body text for the test. English body text for the test. English body text for the test. English body text for the test. </a:t>
+            </a:r>
+          </a:p>
+        </p:txBody>
+      </p:sp>
     </p:spTree>
   </p:cSld>
   <p:clrMapOvr>
@@ -8463,30 +8623,38 @@
           </a:p>
         </p:txBody>
       </p:sp>
-      <p:pic>
-        <p:nvPicPr>
-          <p:cNvPr id="3" name="Picture 2" descr="image.jpg"/>
-          <p:cNvPicPr>
-            <a:picLocks noChangeAspect="1"/>
-          </p:cNvPicPr>
-          <p:nvPr/>
-        </p:nvPicPr>
-        <p:blipFill>
-          <a:blip r:embed="rId2"/>
-          <a:stretch>
-            <a:fillRect/>
-          </a:stretch>
-        </p:blipFill>
+      <p:sp>
+        <p:nvSpPr>
+          <p:cNvPr id="3" name="TextBox 2"/>
+          <p:cNvSpPr txBox="1"/>
+          <p:nvPr/>
+        </p:nvSpPr>
         <p:spPr>
           <a:xfrm>
             <a:off x="457200" y="1371600"/>
-            <a:ext cx="7315200" cy="4114800"/>
-          </a:xfrm>
-          <a:prstGeom prst="rect">
-            <a:avLst/>
-          </a:prstGeom>
-        </p:spPr>
-      </p:pic>
+            <a:ext cx="11277295" cy="3657600"/>
+          </a:xfrm>
+          <a:prstGeom prst="rect">
+            <a:avLst/>
+          </a:prstGeom>
+          <a:noFill/>
+        </p:spPr>
+        <p:txBody>
+          <a:bodyPr wrap="square">
+            <a:spAutoFit/>
+          </a:bodyPr>
+          <a:lstStyle/>
+          <a:p>
+            <a:pPr algn="r" rtl="1"/>
+            <a:r>
+              <a:rPr sz="2000" lang="ar-SA">
+                <a:latin typeface="Arial"/>
+              </a:rPr>
+              <a:t>هذا نص عربي للاختبار. هذا نص عربي للاختبار. هذا نص عربي للاختبار. هذا نص عربي للاختبار. هذا نص عربي للاختبار. هذا نص عربي للاختبار. هذا نص عربي للاختبار. هذا نص عربي للاختبار. </a:t>
+            </a:r>
+          </a:p>
+        </p:txBody>
+      </p:sp>
     </p:spTree>
   </p:cSld>
   <p:clrMapOvr>
@@ -8783,30 +8951,38 @@
           </a:p>
         </p:txBody>
       </p:sp>
-      <p:pic>
-        <p:nvPicPr>
-          <p:cNvPr id="3" name="Picture 2" descr="image.jpg"/>
-          <p:cNvPicPr>
-            <a:picLocks noChangeAspect="1"/>
-          </p:cNvPicPr>
-          <p:nvPr/>
-        </p:nvPicPr>
-        <p:blipFill>
-          <a:blip r:embed="rId2"/>
-          <a:stretch>
-            <a:fillRect/>
-          </a:stretch>
-        </p:blipFill>
+      <p:sp>
+        <p:nvSpPr>
+          <p:cNvPr id="3" name="TextBox 2"/>
+          <p:cNvSpPr txBox="1"/>
+          <p:nvPr/>
+        </p:nvSpPr>
         <p:spPr>
           <a:xfrm>
             <a:off x="457200" y="1371600"/>
-            <a:ext cx="7315200" cy="4114800"/>
-          </a:xfrm>
-          <a:prstGeom prst="rect">
-            <a:avLst/>
-          </a:prstGeom>
-        </p:spPr>
-      </p:pic>
+            <a:ext cx="11277295" cy="3657600"/>
+          </a:xfrm>
+          <a:prstGeom prst="rect">
+            <a:avLst/>
+          </a:prstGeom>
+          <a:noFill/>
+        </p:spPr>
+        <p:txBody>
+          <a:bodyPr wrap="square">
+            <a:spAutoFit/>
+          </a:bodyPr>
+          <a:lstStyle/>
+          <a:p>
+            <a:pPr algn="l"/>
+            <a:r>
+              <a:rPr sz="2000">
+                <a:latin typeface="Arial"/>
+              </a:rPr>
+              <a:t>English body text for the test. English body text for the test. English body text for the test. English body text for the test. English body text for the test. English body text for the test. English body text for the test. English body text for the test. </a:t>
+            </a:r>
+          </a:p>
+        </p:txBody>
+      </p:sp>
     </p:spTree>
   </p:cSld>
   <p:clrMapOvr>
@@ -9021,30 +9197,38 @@
           </a:p>
         </p:txBody>
       </p:sp>
-      <p:pic>
-        <p:nvPicPr>
-          <p:cNvPr id="3" name="Picture 2" descr="image.jpg"/>
-          <p:cNvPicPr>
-            <a:picLocks noChangeAspect="1"/>
-          </p:cNvPicPr>
-          <p:nvPr/>
-        </p:nvPicPr>
-        <p:blipFill>
-          <a:blip r:embed="rId2"/>
-          <a:stretch>
-            <a:fillRect/>
-          </a:stretch>
-        </p:blipFill>
+      <p:sp>
+        <p:nvSpPr>
+          <p:cNvPr id="3" name="TextBox 2"/>
+          <p:cNvSpPr txBox="1"/>
+          <p:nvPr/>
+        </p:nvSpPr>
         <p:spPr>
           <a:xfrm>
             <a:off x="457200" y="1371600"/>
-            <a:ext cx="7315200" cy="4114800"/>
-          </a:xfrm>
-          <a:prstGeom prst="rect">
-            <a:avLst/>
-          </a:prstGeom>
-        </p:spPr>
-      </p:pic>
+            <a:ext cx="11277295" cy="3657600"/>
+          </a:xfrm>
+          <a:prstGeom prst="rect">
+            <a:avLst/>
+          </a:prstGeom>
+          <a:noFill/>
+        </p:spPr>
+        <p:txBody>
+          <a:bodyPr wrap="square">
+            <a:spAutoFit/>
+          </a:bodyPr>
+          <a:lstStyle/>
+          <a:p>
+            <a:pPr algn="r" rtl="1"/>
+            <a:r>
+              <a:rPr sz="2000" lang="ar-SA">
+                <a:latin typeface="Arial"/>
+              </a:rPr>
+              <a:t>هذا نص عربي للاختبار. هذا نص عربي للاختبار. هذا نص عربي للاختبار. هذا نص عربي للاختبار. هذا نص عربي للاختبار. هذا نص عربي للاختبار. هذا نص عربي للاختبار. هذا نص عربي للاختبار. </a:t>
+            </a:r>
+          </a:p>
+        </p:txBody>
+      </p:sp>
     </p:spTree>
   </p:cSld>
   <p:clrMapOvr>
@@ -9259,30 +9443,38 @@
           </a:p>
         </p:txBody>
       </p:sp>
-      <p:pic>
-        <p:nvPicPr>
-          <p:cNvPr id="3" name="Picture 2" descr="image.jpg"/>
-          <p:cNvPicPr>
-            <a:picLocks noChangeAspect="1"/>
-          </p:cNvPicPr>
-          <p:nvPr/>
-        </p:nvPicPr>
-        <p:blipFill>
-          <a:blip r:embed="rId2"/>
-          <a:stretch>
-            <a:fillRect/>
-          </a:stretch>
-        </p:blipFill>
+      <p:sp>
+        <p:nvSpPr>
+          <p:cNvPr id="3" name="TextBox 2"/>
+          <p:cNvSpPr txBox="1"/>
+          <p:nvPr/>
+        </p:nvSpPr>
         <p:spPr>
           <a:xfrm>
             <a:off x="457200" y="1371600"/>
-            <a:ext cx="7315200" cy="4114800"/>
-          </a:xfrm>
-          <a:prstGeom prst="rect">
-            <a:avLst/>
-          </a:prstGeom>
-        </p:spPr>
-      </p:pic>
+            <a:ext cx="11277295" cy="3657600"/>
+          </a:xfrm>
+          <a:prstGeom prst="rect">
+            <a:avLst/>
+          </a:prstGeom>
+          <a:noFill/>
+        </p:spPr>
+        <p:txBody>
+          <a:bodyPr wrap="square">
+            <a:spAutoFit/>
+          </a:bodyPr>
+          <a:lstStyle/>
+          <a:p>
+            <a:pPr algn="l"/>
+            <a:r>
+              <a:rPr sz="2000">
+                <a:latin typeface="Arial"/>
+              </a:rPr>
+              <a:t>English body text for the test. English body text for the test. English body text for the test. English body text for the test. English body text for the test. English body text for the test. English body text for the test. English body text for the test. </a:t>
+            </a:r>
+          </a:p>
+        </p:txBody>
+      </p:sp>
     </p:spTree>
   </p:cSld>
   <p:clrMapOvr>
@@ -9579,30 +9771,38 @@
           </a:p>
         </p:txBody>
       </p:sp>
-      <p:pic>
-        <p:nvPicPr>
-          <p:cNvPr id="3" name="Picture 2" descr="image.jpg"/>
-          <p:cNvPicPr>
-            <a:picLocks noChangeAspect="1"/>
-          </p:cNvPicPr>
-          <p:nvPr/>
-        </p:nvPicPr>
-        <p:blipFill>
-          <a:blip r:embed="rId2"/>
-          <a:stretch>
-            <a:fillRect/>
-          </a:stretch>
-        </p:blipFill>
+      <p:sp>
+        <p:nvSpPr>
+          <p:cNvPr id="3" name="TextBox 2"/>
+          <p:cNvSpPr txBox="1"/>
+          <p:nvPr/>
+        </p:nvSpPr>
         <p:spPr>
           <a:xfrm>
             <a:off x="457200" y="1371600"/>
-            <a:ext cx="7315200" cy="4114800"/>
-          </a:xfrm>
-          <a:prstGeom prst="rect">
-            <a:avLst/>
-          </a:prstGeom>
-        </p:spPr>
-      </p:pic>
+            <a:ext cx="11277295" cy="3657600"/>
+          </a:xfrm>
+          <a:prstGeom prst="rect">
+            <a:avLst/>
+          </a:prstGeom>
+          <a:noFill/>
+        </p:spPr>
+        <p:txBody>
+          <a:bodyPr wrap="square">
+            <a:spAutoFit/>
+          </a:bodyPr>
+          <a:lstStyle/>
+          <a:p>
+            <a:pPr algn="r" rtl="1"/>
+            <a:r>
+              <a:rPr sz="2000" lang="ar-SA">
+                <a:latin typeface="Arial"/>
+              </a:rPr>
+              <a:t>هذا نص عربي للاختبار. هذا نص عربي للاختبار. هذا نص عربي للاختبار. هذا نص عربي للاختبار. هذا نص عربي للاختبار. هذا نص عربي للاختبار. هذا نص عربي للاختبار. هذا نص عربي للاختبار. </a:t>
+            </a:r>
+          </a:p>
+        </p:txBody>
+      </p:sp>
     </p:spTree>
   </p:cSld>
   <p:clrMapOvr>
@@ -9817,30 +10017,38 @@
           </a:p>
         </p:txBody>
       </p:sp>
-      <p:pic>
-        <p:nvPicPr>
-          <p:cNvPr id="3" name="Picture 2" descr="image.jpg"/>
-          <p:cNvPicPr>
-            <a:picLocks noChangeAspect="1"/>
-          </p:cNvPicPr>
-          <p:nvPr/>
-        </p:nvPicPr>
-        <p:blipFill>
-          <a:blip r:embed="rId2"/>
-          <a:stretch>
-            <a:fillRect/>
-          </a:stretch>
-        </p:blipFill>
+      <p:sp>
+        <p:nvSpPr>
+          <p:cNvPr id="3" name="TextBox 2"/>
+          <p:cNvSpPr txBox="1"/>
+          <p:nvPr/>
+        </p:nvSpPr>
         <p:spPr>
           <a:xfrm>
             <a:off x="457200" y="1371600"/>
-            <a:ext cx="7315200" cy="4114800"/>
-          </a:xfrm>
-          <a:prstGeom prst="rect">
-            <a:avLst/>
-          </a:prstGeom>
-        </p:spPr>
-      </p:pic>
+            <a:ext cx="11277295" cy="3657600"/>
+          </a:xfrm>
+          <a:prstGeom prst="rect">
+            <a:avLst/>
+          </a:prstGeom>
+          <a:noFill/>
+        </p:spPr>
+        <p:txBody>
+          <a:bodyPr wrap="square">
+            <a:spAutoFit/>
+          </a:bodyPr>
+          <a:lstStyle/>
+          <a:p>
+            <a:pPr algn="l"/>
+            <a:r>
+              <a:rPr sz="2000">
+                <a:latin typeface="Arial"/>
+              </a:rPr>
+              <a:t>English body text for the test. English body text for the test. English body text for the test. English body text for the test. English body text for the test. English body text for the test. English body text for the test. English body text for the test. </a:t>
+            </a:r>
+          </a:p>
+        </p:txBody>
+      </p:sp>
     </p:spTree>
   </p:cSld>
   <p:clrMapOvr>
@@ -10055,30 +10263,38 @@
           </a:p>
         </p:txBody>
       </p:sp>
-      <p:pic>
-        <p:nvPicPr>
-          <p:cNvPr id="3" name="Picture 2" descr="image.jpg"/>
-          <p:cNvPicPr>
-            <a:picLocks noChangeAspect="1"/>
-          </p:cNvPicPr>
-          <p:nvPr/>
-        </p:nvPicPr>
-        <p:blipFill>
-          <a:blip r:embed="rId2"/>
-          <a:stretch>
-            <a:fillRect/>
-          </a:stretch>
-        </p:blipFill>
+      <p:sp>
+        <p:nvSpPr>
+          <p:cNvPr id="3" name="TextBox 2"/>
+          <p:cNvSpPr txBox="1"/>
+          <p:nvPr/>
+        </p:nvSpPr>
         <p:spPr>
           <a:xfrm>
             <a:off x="457200" y="1371600"/>
-            <a:ext cx="7315200" cy="4114800"/>
-          </a:xfrm>
-          <a:prstGeom prst="rect">
-            <a:avLst/>
-          </a:prstGeom>
-        </p:spPr>
-      </p:pic>
+            <a:ext cx="11277295" cy="3657600"/>
+          </a:xfrm>
+          <a:prstGeom prst="rect">
+            <a:avLst/>
+          </a:prstGeom>
+          <a:noFill/>
+        </p:spPr>
+        <p:txBody>
+          <a:bodyPr wrap="square">
+            <a:spAutoFit/>
+          </a:bodyPr>
+          <a:lstStyle/>
+          <a:p>
+            <a:pPr algn="r" rtl="1"/>
+            <a:r>
+              <a:rPr sz="2000" lang="ar-SA">
+                <a:latin typeface="Arial"/>
+              </a:rPr>
+              <a:t>هذا نص عربي للاختبار. هذا نص عربي للاختبار. هذا نص عربي للاختبار. هذا نص عربي للاختبار. هذا نص عربي للاختبار. هذا نص عربي للاختبار. هذا نص عربي للاختبار. هذا نص عربي للاختبار. </a:t>
+            </a:r>
+          </a:p>
+        </p:txBody>
+      </p:sp>
     </p:spTree>
   </p:cSld>
   <p:clrMapOvr>
@@ -10293,30 +10509,38 @@
           </a:p>
         </p:txBody>
       </p:sp>
-      <p:pic>
-        <p:nvPicPr>
-          <p:cNvPr id="3" name="Picture 2" descr="image.jpg"/>
-          <p:cNvPicPr>
-            <a:picLocks noChangeAspect="1"/>
-          </p:cNvPicPr>
-          <p:nvPr/>
-        </p:nvPicPr>
-        <p:blipFill>
-          <a:blip r:embed="rId2"/>
-          <a:stretch>
-            <a:fillRect/>
-          </a:stretch>
-        </p:blipFill>
+      <p:sp>
+        <p:nvSpPr>
+          <p:cNvPr id="3" name="TextBox 2"/>
+          <p:cNvSpPr txBox="1"/>
+          <p:nvPr/>
+        </p:nvSpPr>
         <p:spPr>
           <a:xfrm>
             <a:off x="457200" y="1371600"/>
-            <a:ext cx="7315200" cy="4114800"/>
-          </a:xfrm>
-          <a:prstGeom prst="rect">
-            <a:avLst/>
-          </a:prstGeom>
-        </p:spPr>
-      </p:pic>
+            <a:ext cx="11277295" cy="3657600"/>
+          </a:xfrm>
+          <a:prstGeom prst="rect">
+            <a:avLst/>
+          </a:prstGeom>
+          <a:noFill/>
+        </p:spPr>
+        <p:txBody>
+          <a:bodyPr wrap="square">
+            <a:spAutoFit/>
+          </a:bodyPr>
+          <a:lstStyle/>
+          <a:p>
+            <a:pPr algn="r" rtl="1"/>
+            <a:r>
+              <a:rPr sz="2000" lang="ar-SA">
+                <a:latin typeface="Arial"/>
+              </a:rPr>
+              <a:t>هذا نص عربي للاختبار. هذا نص عربي للاختبار. هذا نص عربي للاختبار. هذا نص عربي للاختبار. هذا نص عربي للاختبار. هذا نص عربي للاختبار. هذا نص عربي للاختبار. هذا نص عربي للاختبار. </a:t>
+            </a:r>
+          </a:p>
+        </p:txBody>
+      </p:sp>
     </p:spTree>
   </p:cSld>
   <p:clrMapOvr>
@@ -10367,30 +10591,38 @@
           </a:p>
         </p:txBody>
       </p:sp>
-      <p:pic>
-        <p:nvPicPr>
-          <p:cNvPr id="3" name="Picture 2" descr="image.jpg"/>
-          <p:cNvPicPr>
-            <a:picLocks noChangeAspect="1"/>
-          </p:cNvPicPr>
-          <p:nvPr/>
-        </p:nvPicPr>
-        <p:blipFill>
-          <a:blip r:embed="rId2"/>
-          <a:stretch>
-            <a:fillRect/>
-          </a:stretch>
-        </p:blipFill>
+      <p:sp>
+        <p:nvSpPr>
+          <p:cNvPr id="3" name="TextBox 2"/>
+          <p:cNvSpPr txBox="1"/>
+          <p:nvPr/>
+        </p:nvSpPr>
         <p:spPr>
           <a:xfrm>
             <a:off x="457200" y="1371600"/>
-            <a:ext cx="7315200" cy="4114800"/>
-          </a:xfrm>
-          <a:prstGeom prst="rect">
-            <a:avLst/>
-          </a:prstGeom>
-        </p:spPr>
-      </p:pic>
+            <a:ext cx="11277295" cy="3657600"/>
+          </a:xfrm>
+          <a:prstGeom prst="rect">
+            <a:avLst/>
+          </a:prstGeom>
+          <a:noFill/>
+        </p:spPr>
+        <p:txBody>
+          <a:bodyPr wrap="square">
+            <a:spAutoFit/>
+          </a:bodyPr>
+          <a:lstStyle/>
+          <a:p>
+            <a:pPr algn="l"/>
+            <a:r>
+              <a:rPr sz="2000">
+                <a:latin typeface="Arial"/>
+              </a:rPr>
+              <a:t>English body text for the test. English body text for the test. English body text for the test. English body text for the test. English body text for the test. English body text for the test. English body text for the test. English body text for the test. </a:t>
+            </a:r>
+          </a:p>
+        </p:txBody>
+      </p:sp>
     </p:spTree>
   </p:cSld>
   <p:clrMapOvr>
@@ -10605,30 +10837,38 @@
           </a:p>
         </p:txBody>
       </p:sp>
-      <p:pic>
-        <p:nvPicPr>
-          <p:cNvPr id="3" name="Picture 2" descr="image.jpg"/>
-          <p:cNvPicPr>
-            <a:picLocks noChangeAspect="1"/>
-          </p:cNvPicPr>
-          <p:nvPr/>
-        </p:nvPicPr>
-        <p:blipFill>
-          <a:blip r:embed="rId2"/>
-          <a:stretch>
-            <a:fillRect/>
-          </a:stretch>
-        </p:blipFill>
+      <p:sp>
+        <p:nvSpPr>
+          <p:cNvPr id="3" name="TextBox 2"/>
+          <p:cNvSpPr txBox="1"/>
+          <p:nvPr/>
+        </p:nvSpPr>
         <p:spPr>
           <a:xfrm>
             <a:off x="457200" y="1371600"/>
-            <a:ext cx="7315200" cy="4114800"/>
-          </a:xfrm>
-          <a:prstGeom prst="rect">
-            <a:avLst/>
-          </a:prstGeom>
-        </p:spPr>
-      </p:pic>
+            <a:ext cx="11277295" cy="3657600"/>
+          </a:xfrm>
+          <a:prstGeom prst="rect">
+            <a:avLst/>
+          </a:prstGeom>
+          <a:noFill/>
+        </p:spPr>
+        <p:txBody>
+          <a:bodyPr wrap="square">
+            <a:spAutoFit/>
+          </a:bodyPr>
+          <a:lstStyle/>
+          <a:p>
+            <a:pPr algn="r" rtl="1"/>
+            <a:r>
+              <a:rPr sz="2000" lang="ar-SA">
+                <a:latin typeface="Arial"/>
+              </a:rPr>
+              <a:t>هذا نص عربي للاختبار. هذا نص عربي للاختبار. هذا نص عربي للاختبار. هذا نص عربي للاختبار. هذا نص عربي للاختبار. هذا نص عربي للاختبار. هذا نص عربي للاختبار. هذا نص عربي للاختبار. </a:t>
+            </a:r>
+          </a:p>
+        </p:txBody>
+      </p:sp>
     </p:spTree>
   </p:cSld>
   <p:clrMapOvr>
@@ -10843,30 +11083,38 @@
           </a:p>
         </p:txBody>
       </p:sp>
-      <p:pic>
-        <p:nvPicPr>
-          <p:cNvPr id="3" name="Picture 2" descr="image.jpg"/>
-          <p:cNvPicPr>
-            <a:picLocks noChangeAspect="1"/>
-          </p:cNvPicPr>
-          <p:nvPr/>
-        </p:nvPicPr>
-        <p:blipFill>
-          <a:blip r:embed="rId2"/>
-          <a:stretch>
-            <a:fillRect/>
-          </a:stretch>
-        </p:blipFill>
+      <p:sp>
+        <p:nvSpPr>
+          <p:cNvPr id="3" name="TextBox 2"/>
+          <p:cNvSpPr txBox="1"/>
+          <p:nvPr/>
+        </p:nvSpPr>
         <p:spPr>
           <a:xfrm>
             <a:off x="457200" y="1371600"/>
-            <a:ext cx="7315200" cy="4114800"/>
-          </a:xfrm>
-          <a:prstGeom prst="rect">
-            <a:avLst/>
-          </a:prstGeom>
-        </p:spPr>
-      </p:pic>
+            <a:ext cx="11277295" cy="3657600"/>
+          </a:xfrm>
+          <a:prstGeom prst="rect">
+            <a:avLst/>
+          </a:prstGeom>
+          <a:noFill/>
+        </p:spPr>
+        <p:txBody>
+          <a:bodyPr wrap="square">
+            <a:spAutoFit/>
+          </a:bodyPr>
+          <a:lstStyle/>
+          <a:p>
+            <a:pPr algn="l"/>
+            <a:r>
+              <a:rPr sz="2000">
+                <a:latin typeface="Arial"/>
+              </a:rPr>
+              <a:t>English body text for the test. English body text for the test. English body text for the test. English body text for the test. English body text for the test. English body text for the test. English body text for the test. English body text for the test. </a:t>
+            </a:r>
+          </a:p>
+        </p:txBody>
+      </p:sp>
     </p:spTree>
   </p:cSld>
   <p:clrMapOvr>
@@ -11081,30 +11329,38 @@
           </a:p>
         </p:txBody>
       </p:sp>
-      <p:pic>
-        <p:nvPicPr>
-          <p:cNvPr id="3" name="Picture 2" descr="image.jpg"/>
-          <p:cNvPicPr>
-            <a:picLocks noChangeAspect="1"/>
-          </p:cNvPicPr>
-          <p:nvPr/>
-        </p:nvPicPr>
-        <p:blipFill>
-          <a:blip r:embed="rId2"/>
-          <a:stretch>
-            <a:fillRect/>
-          </a:stretch>
-        </p:blipFill>
+      <p:sp>
+        <p:nvSpPr>
+          <p:cNvPr id="3" name="TextBox 2"/>
+          <p:cNvSpPr txBox="1"/>
+          <p:nvPr/>
+        </p:nvSpPr>
         <p:spPr>
           <a:xfrm>
             <a:off x="457200" y="1371600"/>
-            <a:ext cx="7315200" cy="4114800"/>
-          </a:xfrm>
-          <a:prstGeom prst="rect">
-            <a:avLst/>
-          </a:prstGeom>
-        </p:spPr>
-      </p:pic>
+            <a:ext cx="11277295" cy="3657600"/>
+          </a:xfrm>
+          <a:prstGeom prst="rect">
+            <a:avLst/>
+          </a:prstGeom>
+          <a:noFill/>
+        </p:spPr>
+        <p:txBody>
+          <a:bodyPr wrap="square">
+            <a:spAutoFit/>
+          </a:bodyPr>
+          <a:lstStyle/>
+          <a:p>
+            <a:pPr algn="r" rtl="1"/>
+            <a:r>
+              <a:rPr sz="2000" lang="ar-SA">
+                <a:latin typeface="Arial"/>
+              </a:rPr>
+              <a:t>هذا نص عربي للاختبار. هذا نص عربي للاختبار. هذا نص عربي للاختبار. هذا نص عربي للاختبار. هذا نص عربي للاختبار. هذا نص عربي للاختبار. هذا نص عربي للاختبار. هذا نص عربي للاختبار. </a:t>
+            </a:r>
+          </a:p>
+        </p:txBody>
+      </p:sp>
     </p:spTree>
   </p:cSld>
   <p:clrMapOvr>
